--- a/web/angular-demos-3-nodejs-rest-api.pptx
+++ b/web/angular-demos-3-nodejs-rest-api.pptx
@@ -322,7 +322,7 @@
           <a:p>
             <a:fld id="{8FFCBF7A-88F4-42AB-8735-0D8B06B496B0}" type="datetimeFigureOut">
               <a:rPr lang="fr-FR" smtClean="0"/>
-              <a:t>26/10/2024</a:t>
+              <a:t>13/10/2025</a:t>
             </a:fld>
             <a:endParaRPr lang="fr-FR"/>
           </a:p>
@@ -376,7 +376,7 @@
           <a:p>
             <a:fld id="{B0D6F847-018D-433C-B615-7770600D82E0}" type="slidenum">
               <a:rPr lang="fr-FR" smtClean="0"/>
-              <a:t>‹#›</a:t>
+              <a:t>‹N°›</a:t>
             </a:fld>
             <a:endParaRPr lang="fr-FR"/>
           </a:p>
@@ -522,7 +522,7 @@
           <a:p>
             <a:fld id="{8FFCBF7A-88F4-42AB-8735-0D8B06B496B0}" type="datetimeFigureOut">
               <a:rPr lang="fr-FR" smtClean="0"/>
-              <a:t>26/10/2024</a:t>
+              <a:t>13/10/2025</a:t>
             </a:fld>
             <a:endParaRPr lang="fr-FR"/>
           </a:p>
@@ -576,7 +576,7 @@
           <a:p>
             <a:fld id="{B0D6F847-018D-433C-B615-7770600D82E0}" type="slidenum">
               <a:rPr lang="fr-FR" smtClean="0"/>
-              <a:t>‹#›</a:t>
+              <a:t>‹N°›</a:t>
             </a:fld>
             <a:endParaRPr lang="fr-FR"/>
           </a:p>
@@ -732,7 +732,7 @@
           <a:p>
             <a:fld id="{8FFCBF7A-88F4-42AB-8735-0D8B06B496B0}" type="datetimeFigureOut">
               <a:rPr lang="fr-FR" smtClean="0"/>
-              <a:t>26/10/2024</a:t>
+              <a:t>13/10/2025</a:t>
             </a:fld>
             <a:endParaRPr lang="fr-FR"/>
           </a:p>
@@ -786,7 +786,7 @@
           <a:p>
             <a:fld id="{B0D6F847-018D-433C-B615-7770600D82E0}" type="slidenum">
               <a:rPr lang="fr-FR" smtClean="0"/>
-              <a:t>‹#›</a:t>
+              <a:t>‹N°›</a:t>
             </a:fld>
             <a:endParaRPr lang="fr-FR"/>
           </a:p>
@@ -932,7 +932,7 @@
           <a:p>
             <a:fld id="{8FFCBF7A-88F4-42AB-8735-0D8B06B496B0}" type="datetimeFigureOut">
               <a:rPr lang="fr-FR" smtClean="0"/>
-              <a:t>26/10/2024</a:t>
+              <a:t>13/10/2025</a:t>
             </a:fld>
             <a:endParaRPr lang="fr-FR"/>
           </a:p>
@@ -986,7 +986,7 @@
           <a:p>
             <a:fld id="{B0D6F847-018D-433C-B615-7770600D82E0}" type="slidenum">
               <a:rPr lang="fr-FR" smtClean="0"/>
-              <a:t>‹#›</a:t>
+              <a:t>‹N°›</a:t>
             </a:fld>
             <a:endParaRPr lang="fr-FR"/>
           </a:p>
@@ -1208,7 +1208,7 @@
           <a:p>
             <a:fld id="{8FFCBF7A-88F4-42AB-8735-0D8B06B496B0}" type="datetimeFigureOut">
               <a:rPr lang="fr-FR" smtClean="0"/>
-              <a:t>26/10/2024</a:t>
+              <a:t>13/10/2025</a:t>
             </a:fld>
             <a:endParaRPr lang="fr-FR"/>
           </a:p>
@@ -1262,7 +1262,7 @@
           <a:p>
             <a:fld id="{B0D6F847-018D-433C-B615-7770600D82E0}" type="slidenum">
               <a:rPr lang="fr-FR" smtClean="0"/>
-              <a:t>‹#›</a:t>
+              <a:t>‹N°›</a:t>
             </a:fld>
             <a:endParaRPr lang="fr-FR"/>
           </a:p>
@@ -1476,7 +1476,7 @@
           <a:p>
             <a:fld id="{8FFCBF7A-88F4-42AB-8735-0D8B06B496B0}" type="datetimeFigureOut">
               <a:rPr lang="fr-FR" smtClean="0"/>
-              <a:t>26/10/2024</a:t>
+              <a:t>13/10/2025</a:t>
             </a:fld>
             <a:endParaRPr lang="fr-FR"/>
           </a:p>
@@ -1530,7 +1530,7 @@
           <a:p>
             <a:fld id="{B0D6F847-018D-433C-B615-7770600D82E0}" type="slidenum">
               <a:rPr lang="fr-FR" smtClean="0"/>
-              <a:t>‹#›</a:t>
+              <a:t>‹N°›</a:t>
             </a:fld>
             <a:endParaRPr lang="fr-FR"/>
           </a:p>
@@ -1891,7 +1891,7 @@
           <a:p>
             <a:fld id="{8FFCBF7A-88F4-42AB-8735-0D8B06B496B0}" type="datetimeFigureOut">
               <a:rPr lang="fr-FR" smtClean="0"/>
-              <a:t>26/10/2024</a:t>
+              <a:t>13/10/2025</a:t>
             </a:fld>
             <a:endParaRPr lang="fr-FR"/>
           </a:p>
@@ -1945,7 +1945,7 @@
           <a:p>
             <a:fld id="{B0D6F847-018D-433C-B615-7770600D82E0}" type="slidenum">
               <a:rPr lang="fr-FR" smtClean="0"/>
-              <a:t>‹#›</a:t>
+              <a:t>‹N°›</a:t>
             </a:fld>
             <a:endParaRPr lang="fr-FR"/>
           </a:p>
@@ -2033,7 +2033,7 @@
           <a:p>
             <a:fld id="{8FFCBF7A-88F4-42AB-8735-0D8B06B496B0}" type="datetimeFigureOut">
               <a:rPr lang="fr-FR" smtClean="0"/>
-              <a:t>26/10/2024</a:t>
+              <a:t>13/10/2025</a:t>
             </a:fld>
             <a:endParaRPr lang="fr-FR"/>
           </a:p>
@@ -2087,7 +2087,7 @@
           <a:p>
             <a:fld id="{B0D6F847-018D-433C-B615-7770600D82E0}" type="slidenum">
               <a:rPr lang="fr-FR" smtClean="0"/>
-              <a:t>‹#›</a:t>
+              <a:t>‹N°›</a:t>
             </a:fld>
             <a:endParaRPr lang="fr-FR"/>
           </a:p>
@@ -2146,7 +2146,7 @@
           <a:p>
             <a:fld id="{8FFCBF7A-88F4-42AB-8735-0D8B06B496B0}" type="datetimeFigureOut">
               <a:rPr lang="fr-FR" smtClean="0"/>
-              <a:t>26/10/2024</a:t>
+              <a:t>13/10/2025</a:t>
             </a:fld>
             <a:endParaRPr lang="fr-FR"/>
           </a:p>
@@ -2200,7 +2200,7 @@
           <a:p>
             <a:fld id="{B0D6F847-018D-433C-B615-7770600D82E0}" type="slidenum">
               <a:rPr lang="fr-FR" smtClean="0"/>
-              <a:t>‹#›</a:t>
+              <a:t>‹N°›</a:t>
             </a:fld>
             <a:endParaRPr lang="fr-FR"/>
           </a:p>
@@ -2459,7 +2459,7 @@
           <a:p>
             <a:fld id="{8FFCBF7A-88F4-42AB-8735-0D8B06B496B0}" type="datetimeFigureOut">
               <a:rPr lang="fr-FR" smtClean="0"/>
-              <a:t>26/10/2024</a:t>
+              <a:t>13/10/2025</a:t>
             </a:fld>
             <a:endParaRPr lang="fr-FR"/>
           </a:p>
@@ -2513,7 +2513,7 @@
           <a:p>
             <a:fld id="{B0D6F847-018D-433C-B615-7770600D82E0}" type="slidenum">
               <a:rPr lang="fr-FR" smtClean="0"/>
-              <a:t>‹#›</a:t>
+              <a:t>‹N°›</a:t>
             </a:fld>
             <a:endParaRPr lang="fr-FR"/>
           </a:p>
@@ -2748,7 +2748,7 @@
           <a:p>
             <a:fld id="{8FFCBF7A-88F4-42AB-8735-0D8B06B496B0}" type="datetimeFigureOut">
               <a:rPr lang="fr-FR" smtClean="0"/>
-              <a:t>26/10/2024</a:t>
+              <a:t>13/10/2025</a:t>
             </a:fld>
             <a:endParaRPr lang="fr-FR"/>
           </a:p>
@@ -2802,7 +2802,7 @@
           <a:p>
             <a:fld id="{B0D6F847-018D-433C-B615-7770600D82E0}" type="slidenum">
               <a:rPr lang="fr-FR" smtClean="0"/>
-              <a:t>‹#›</a:t>
+              <a:t>‹N°›</a:t>
             </a:fld>
             <a:endParaRPr lang="fr-FR"/>
           </a:p>
@@ -2991,7 +2991,7 @@
           <a:p>
             <a:fld id="{8FFCBF7A-88F4-42AB-8735-0D8B06B496B0}" type="datetimeFigureOut">
               <a:rPr lang="fr-FR" smtClean="0"/>
-              <a:t>26/10/2024</a:t>
+              <a:t>13/10/2025</a:t>
             </a:fld>
             <a:endParaRPr lang="fr-FR"/>
           </a:p>
@@ -3081,7 +3081,7 @@
           <a:p>
             <a:fld id="{B0D6F847-018D-433C-B615-7770600D82E0}" type="slidenum">
               <a:rPr lang="fr-FR" smtClean="0"/>
-              <a:t>‹#›</a:t>
+              <a:t>‹N°›</a:t>
             </a:fld>
             <a:endParaRPr lang="fr-FR"/>
           </a:p>
@@ -3458,35 +3458,20 @@
               <a:rPr lang="fr-FR" dirty="0"/>
             </a:br>
             <a:r>
-              <a:rPr lang="fr-FR" dirty="0"/>
-              <a:t>Part 3: </a:t>
-            </a:r>
-            <a:r>
               <a:rPr lang="fr-FR" dirty="0" err="1"/>
-              <a:t>Demo</a:t>
-            </a:r>
-            <a:r>
-              <a:rPr lang="fr-FR" dirty="0"/>
-              <a:t> </a:t>
-            </a:r>
-            <a:br>
-              <a:rPr lang="fr-FR" dirty="0"/>
-            </a:br>
+              <a:t>Rest</a:t>
+            </a:r>
+            <a:r>
+              <a:rPr lang="fr-FR" dirty="0"/>
+              <a:t> Api (</a:t>
+            </a:r>
             <a:r>
               <a:rPr lang="fr-FR" dirty="0" err="1"/>
               <a:t>NodeJs</a:t>
             </a:r>
             <a:r>
               <a:rPr lang="fr-FR" dirty="0"/>
-              <a:t> </a:t>
-            </a:r>
-            <a:r>
-              <a:rPr lang="fr-FR" dirty="0" err="1"/>
-              <a:t>Rest</a:t>
-            </a:r>
-            <a:r>
-              <a:rPr lang="fr-FR" dirty="0"/>
-              <a:t> Api</a:t>
+              <a:t>)</a:t>
             </a:r>
           </a:p>
         </p:txBody>
@@ -3538,7 +3523,7 @@
             </a:r>
             <a:r>
               <a:rPr lang="fr-FR" dirty="0"/>
-              <a:t> 2023</a:t>
+              <a:t> 2025</a:t>
             </a:r>
           </a:p>
           <a:p>
